--- a/deck/slides/the-ai-control-plane-slide-15.pptx
+++ b/deck/slides/the-ai-control-plane-slide-15.pptx
@@ -491,7 +491,12 @@
             <p:ph type="sldImg"/>
           </p:nvPr>
         </p:nvSpPr>
-        <p:spPr/>
+        <p:spPr>
+          <a:xfrm>
+            <a:off x="457200" y="762000"/>
+            <a:ext cx="5943600" cy="3343275"/>
+          </a:xfrm>
+        </p:spPr>
       </p:sp>
       <p:sp>
         <p:nvSpPr>
@@ -503,7 +508,12 @@
             <p:ph type="body" idx="1"/>
           </p:nvPr>
         </p:nvSpPr>
-        <p:spPr/>
+        <p:spPr>
+          <a:xfrm>
+            <a:off x="457200" y="4419600"/>
+            <a:ext cx="5943600" cy="6705600"/>
+          </a:xfrm>
+        </p:spPr>
         <p:txBody>
           <a:bodyPr/>
           <a:lstStyle/>
@@ -630,7 +640,12 @@
             <p:ph type="sldNum" sz="quarter" idx="10"/>
           </p:nvPr>
         </p:nvSpPr>
-        <p:spPr/>
+        <p:spPr>
+          <a:xfrm>
+            <a:off x="3886200" y="11430000"/>
+            <a:ext cx="2514600" cy="457200"/>
+          </a:xfrm>
+        </p:spPr>
         <p:txBody>
           <a:bodyPr/>
           <a:lstStyle/>
@@ -2530,9 +2545,6 @@
             <a:pPr indent="0" marL="0">
               <a:buNone/>
             </a:pPr>
-            <a:pPr indent="0" marL="0">
-              <a:buNone/>
-            </a:pPr>
             <a:r>
               <a:rPr lang="en-US" sz="900" i="1" dirty="0">
                 <a:solidFill>

--- a/deck/slides/the-ai-control-plane-slide-15.pptx
+++ b/deck/slides/the-ai-control-plane-slide-15.pptx
@@ -601,6 +601,16 @@
                 <a:hlinkClick r:id="rId4"/>
               </a:rPr>
               <a:t>https://johnfisher-ai.github.io/ai-control-plane-handbook/deck/</a:t>
+            </a:r>
+            <a:r>
+              <a:rPr lang="en-US" dirty="0"/>
+              <a:t>. You may adapt this slide, with credit, under the additional permission in the deck’s notices: </a:t>
+            </a:r>
+            <a:r>
+              <a:rPr lang="en-US" dirty="0">
+                <a:hlinkClick r:id="rId6"/>
+              </a:rPr>
+              <a:t>https://johnfisher-ai.github.io/ai-control-plane-handbook/deck/notices.html#permission</a:t>
             </a:r>
             <a:r>
               <a:rPr lang="en-US" dirty="0"/>

--- a/deck/slides/the-ai-control-plane-slide-15.pptx
+++ b/deck/slides/the-ai-control-plane-slide-15.pptx
@@ -1084,7 +1084,7 @@
                 <a:ea typeface="Plus Jakarta Sans" pitchFamily="34" charset="-122"/>
                 <a:cs typeface="Plus Jakarta Sans" pitchFamily="34" charset="-120"/>
               </a:rPr>
-              <a:t>Tiers that travel, and move in both directions</a:t>
+              <a:t>Tiers that travel and move in both directions</a:t>
             </a:r>
             <a:endParaRPr lang="en-US" sz="2600" dirty="0"/>
           </a:p>
@@ -1517,7 +1517,28 @@
                           <a:ea typeface="Plus Jakarta Sans" pitchFamily="34" charset="-122"/>
                           <a:cs typeface="Plus Jakarta Sans" pitchFamily="34" charset="-120"/>
                         </a:rPr>
-                        <a:t>Scope 1, No Agency (read-only); Scope 2, Prescribed Agency</a:t>
+                        <a:t>Scope 1, No Agency (read-only)</a:t>
+                      </a:r>
+                      <a:endParaRPr lang="en-US" sz="1000" dirty="0">
+                        <a:latin typeface="Plus Jakarta Sans" charset="0"/>
+                        <a:ea typeface="Plus Jakarta Sans" charset="0"/>
+                        <a:cs typeface="Plus Jakarta Sans" charset="0"/>
+                      </a:endParaRPr>
+                    </a:p>
+                    <a:p>
+                      <a:pPr indent="0" marL="0">
+                        <a:buNone/>
+                      </a:pPr>
+                      <a:r>
+                        <a:rPr lang="en-US" sz="1000" dirty="0">
+                          <a:solidFill>
+                            <a:srgbClr val="334155"/>
+                          </a:solidFill>
+                          <a:latin typeface="Plus Jakarta Sans" pitchFamily="34" charset="0"/>
+                          <a:ea typeface="Plus Jakarta Sans" pitchFamily="34" charset="-122"/>
+                          <a:cs typeface="Plus Jakarta Sans" pitchFamily="34" charset="-120"/>
+                        </a:rPr>
+                        <a:t>Scope 2, Prescribed Agency</a:t>
                       </a:r>
                       <a:endParaRPr lang="en-US" sz="1000" dirty="0">
                         <a:latin typeface="Plus Jakarta Sans" charset="0"/>
@@ -1585,7 +1606,28 @@
                           <a:ea typeface="Plus Jakarta Sans" pitchFamily="34" charset="-122"/>
                           <a:cs typeface="Plus Jakarta Sans" pitchFamily="34" charset="-120"/>
                         </a:rPr>
-                        <a:t>Shadow; supervised</a:t>
+                        <a:t>Shadow</a:t>
+                      </a:r>
+                      <a:endParaRPr lang="en-US" sz="1000" dirty="0">
+                        <a:latin typeface="Plus Jakarta Sans" charset="0"/>
+                        <a:ea typeface="Plus Jakarta Sans" charset="0"/>
+                        <a:cs typeface="Plus Jakarta Sans" charset="0"/>
+                      </a:endParaRPr>
+                    </a:p>
+                    <a:p>
+                      <a:pPr indent="0" marL="0">
+                        <a:buNone/>
+                      </a:pPr>
+                      <a:r>
+                        <a:rPr lang="en-US" sz="1000" dirty="0">
+                          <a:solidFill>
+                            <a:srgbClr val="334155"/>
+                          </a:solidFill>
+                          <a:latin typeface="Plus Jakarta Sans" pitchFamily="34" charset="0"/>
+                          <a:ea typeface="Plus Jakarta Sans" pitchFamily="34" charset="-122"/>
+                          <a:cs typeface="Plus Jakarta Sans" pitchFamily="34" charset="-120"/>
+                        </a:rPr>
+                        <a:t>Supervised</a:t>
                       </a:r>
                       <a:endParaRPr lang="en-US" sz="1000" dirty="0">
                         <a:latin typeface="Plus Jakarta Sans" charset="0"/>
@@ -1653,7 +1695,28 @@
                           <a:ea typeface="Plus Jakarta Sans" pitchFamily="34" charset="-122"/>
                           <a:cs typeface="Plus Jakarta Sans" pitchFamily="34" charset="-120"/>
                         </a:rPr>
-                        <a:t>Taskers; collaborators</a:t>
+                        <a:t>Taskers</a:t>
+                      </a:r>
+                      <a:endParaRPr lang="en-US" sz="1000" dirty="0">
+                        <a:latin typeface="Plus Jakarta Sans" charset="0"/>
+                        <a:ea typeface="Plus Jakarta Sans" charset="0"/>
+                        <a:cs typeface="Plus Jakarta Sans" charset="0"/>
+                      </a:endParaRPr>
+                    </a:p>
+                    <a:p>
+                      <a:pPr indent="0" marL="0">
+                        <a:buNone/>
+                      </a:pPr>
+                      <a:r>
+                        <a:rPr lang="en-US" sz="1000" dirty="0">
+                          <a:solidFill>
+                            <a:srgbClr val="334155"/>
+                          </a:solidFill>
+                          <a:latin typeface="Plus Jakarta Sans" pitchFamily="34" charset="0"/>
+                          <a:ea typeface="Plus Jakarta Sans" pitchFamily="34" charset="-122"/>
+                          <a:cs typeface="Plus Jakarta Sans" pitchFamily="34" charset="-120"/>
+                        </a:rPr>
+                        <a:t>Collaborators</a:t>
                       </a:r>
                       <a:endParaRPr lang="en-US" sz="1000" dirty="0">
                         <a:latin typeface="Plus Jakarta Sans" charset="0"/>
@@ -1859,7 +1922,28 @@
                           <a:ea typeface="Plus Jakarta Sans" pitchFamily="34" charset="-122"/>
                           <a:cs typeface="Plus Jakarta Sans" pitchFamily="34" charset="-120"/>
                         </a:rPr>
-                        <a:t>Supervised; guided autonomy</a:t>
+                        <a:t>Supervised</a:t>
+                      </a:r>
+                      <a:endParaRPr lang="en-US" sz="1000" dirty="0">
+                        <a:latin typeface="Plus Jakarta Sans" charset="0"/>
+                        <a:ea typeface="Plus Jakarta Sans" charset="0"/>
+                        <a:cs typeface="Plus Jakarta Sans" charset="0"/>
+                      </a:endParaRPr>
+                    </a:p>
+                    <a:p>
+                      <a:pPr indent="0" marL="0">
+                        <a:buNone/>
+                      </a:pPr>
+                      <a:r>
+                        <a:rPr lang="en-US" sz="1000" dirty="0">
+                          <a:solidFill>
+                            <a:srgbClr val="334155"/>
+                          </a:solidFill>
+                          <a:latin typeface="Plus Jakarta Sans" pitchFamily="34" charset="0"/>
+                          <a:ea typeface="Plus Jakarta Sans" pitchFamily="34" charset="-122"/>
+                          <a:cs typeface="Plus Jakarta Sans" pitchFamily="34" charset="-120"/>
+                        </a:rPr>
+                        <a:t>Guided autonomy</a:t>
                       </a:r>
                       <a:endParaRPr lang="en-US" sz="1000" dirty="0">
                         <a:latin typeface="Plus Jakarta Sans" charset="0"/>
@@ -1927,7 +2011,28 @@
                           <a:ea typeface="Plus Jakarta Sans" pitchFamily="34" charset="-122"/>
                           <a:cs typeface="Plus Jakarta Sans" pitchFamily="34" charset="-120"/>
                         </a:rPr>
-                        <a:t>Taskers; automators</a:t>
+                        <a:t>Taskers</a:t>
+                      </a:r>
+                      <a:endParaRPr lang="en-US" sz="1000" dirty="0">
+                        <a:latin typeface="Plus Jakarta Sans" charset="0"/>
+                        <a:ea typeface="Plus Jakarta Sans" charset="0"/>
+                        <a:cs typeface="Plus Jakarta Sans" charset="0"/>
+                      </a:endParaRPr>
+                    </a:p>
+                    <a:p>
+                      <a:pPr indent="0" marL="0">
+                        <a:buNone/>
+                      </a:pPr>
+                      <a:r>
+                        <a:rPr lang="en-US" sz="1000" dirty="0">
+                          <a:solidFill>
+                            <a:srgbClr val="334155"/>
+                          </a:solidFill>
+                          <a:latin typeface="Plus Jakarta Sans" pitchFamily="34" charset="0"/>
+                          <a:ea typeface="Plus Jakarta Sans" pitchFamily="34" charset="-122"/>
+                          <a:cs typeface="Plus Jakarta Sans" pitchFamily="34" charset="-120"/>
+                        </a:rPr>
+                        <a:t>Automators</a:t>
                       </a:r>
                       <a:endParaRPr lang="en-US" sz="1000" dirty="0">
                         <a:latin typeface="Plus Jakarta Sans" charset="0"/>
@@ -3091,7 +3196,7 @@
                 <a:ea typeface="Plus Jakarta Sans" pitchFamily="34" charset="-122"/>
                 <a:cs typeface="Plus Jakarta Sans" pitchFamily="34" charset="-120"/>
               </a:rPr>
-              <a:t>DELEGATION CHAINS: NARROW AUTHORITY AT EVERY HOP</a:t>
+              <a:t>NARROW AUTHORITY AT EVERY HOP OF A DELEGATION CHAIN</a:t>
             </a:r>
             <a:endParaRPr lang="en-US" sz="1000" dirty="0"/>
           </a:p>
